--- a/outputs/ophthalmology-batch-20261011/ok_fitting/A4_bw_editable.pptx
+++ b/outputs/ophthalmology-batch-20261011/ok_fitting/A4_bw_editable.pptx
@@ -519,7 +519,7 @@
           <a:p/>
           <a:p>
             <a:r>
-              <a:t>ok_fitting-02 明确数值禁忌：8岁以下儿童；角膜内皮细胞密度少于2 000个/mm²，为原文禁忌证。</a:t>
+              <a:t>ok_fitting-02 明确数值禁忌：8岁以下儿童（原文表述，8岁整的边界未单独说明）；角膜内皮细胞密度少于2 000个/mm²，为原文禁忌证。</a:t>
             </a:r>
           </a:p>
           <a:p>
@@ -3979,7 +3979,7 @@
         <p:spPr>
           <a:xfrm>
             <a:off x="172720" y="762220"/>
-            <a:ext cx="3434560" cy="716280"/>
+            <a:ext cx="3434560" cy="863600"/>
           </a:xfrm>
           <a:prstGeom prst="rect">
             <a:avLst/>
@@ -4064,14 +4064,14 @@
       </p:sp>
       <p:sp>
         <p:nvSpPr>
-          <p:cNvPr id="7" name="按镜片注册范围；角膜曲率39.00～48.00 D；卫生、理解及依从性良好。禁忌：&lt;8岁，内皮密度&lt;"/>
+          <p:cNvPr id="7" name="按镜片注册范围；角膜曲率39.00～48.00 D；卫生、理解及依从性良好。禁忌：8岁以下（原文表述"/>
           <p:cNvSpPr txBox="1"/>
           <p:nvPr/>
         </p:nvSpPr>
         <p:spPr>
           <a:xfrm>
             <a:off x="274320" y="952720"/>
-            <a:ext cx="3231360" cy="358140"/>
+            <a:ext cx="3231360" cy="505459"/>
           </a:xfrm>
           <a:prstGeom prst="rect">
             <a:avLst/>
@@ -4128,7 +4128,31 @@
                 <a:ea typeface="Microsoft YaHei"/>
                 <a:cs typeface="Microsoft YaHei"/>
               </a:rPr>
-              <a:t>依从性良好。禁忌：&lt;8岁，内皮密度&lt;2 000个/mm²。</a:t>
+              <a:t>依从性良好。禁忌：8岁以下（原文表述），内皮密度&lt;2 000</a:t>
+            </a:r>
+          </a:p>
+          <a:p>
+            <a:pPr>
+              <a:lnSpc>
+                <a:spcPts val="1160"/>
+              </a:lnSpc>
+              <a:spcBef>
+                <a:spcPts val="0"/>
+              </a:spcBef>
+              <a:spcAft>
+                <a:spcPts val="0"/>
+              </a:spcAft>
+            </a:pPr>
+            <a:r>
+              <a:rPr sz="950" b="0" lang="zh-CN">
+                <a:solidFill>
+                  <a:srgbClr val="000000"/>
+                </a:solidFill>
+                <a:latin typeface="Microsoft YaHei"/>
+                <a:ea typeface="Microsoft YaHei"/>
+                <a:cs typeface="Microsoft YaHei"/>
+              </a:rPr>
+              <a:t>个/mm²。</a:t>
             </a:r>
           </a:p>
         </p:txBody>
@@ -4141,7 +4165,7 @@
         </p:nvSpPr>
         <p:spPr>
           <a:xfrm>
-            <a:off x="274320" y="1272760"/>
+            <a:off x="274320" y="1420080"/>
             <a:ext cx="3231360" cy="193040"/>
           </a:xfrm>
           <a:prstGeom prst="rect">
@@ -4188,7 +4212,7 @@
         </p:nvSpPr>
         <p:spPr>
           <a:xfrm>
-            <a:off x="172720" y="1529300"/>
+            <a:off x="172720" y="1676620"/>
             <a:ext cx="3434560" cy="863600"/>
           </a:xfrm>
           <a:prstGeom prst="rect">
@@ -4233,7 +4257,7 @@
         </p:nvSpPr>
         <p:spPr>
           <a:xfrm>
-            <a:off x="274320" y="1567400"/>
+            <a:off x="274320" y="1714720"/>
             <a:ext cx="3231360" cy="215900"/>
           </a:xfrm>
           <a:prstGeom prst="rect">
@@ -4280,7 +4304,7 @@
         </p:nvSpPr>
         <p:spPr>
           <a:xfrm>
-            <a:off x="274320" y="1719800"/>
+            <a:off x="274320" y="1867120"/>
             <a:ext cx="3231360" cy="505459"/>
           </a:xfrm>
           <a:prstGeom prst="rect">
@@ -4375,7 +4399,7 @@
         </p:nvSpPr>
         <p:spPr>
           <a:xfrm>
-            <a:off x="274320" y="2187160"/>
+            <a:off x="274320" y="2334480"/>
             <a:ext cx="3231360" cy="193040"/>
           </a:xfrm>
           <a:prstGeom prst="rect">
@@ -4422,7 +4446,7 @@
         </p:nvSpPr>
         <p:spPr>
           <a:xfrm>
-            <a:off x="172720" y="2443700"/>
+            <a:off x="172720" y="2591020"/>
             <a:ext cx="3434560" cy="716280"/>
           </a:xfrm>
           <a:prstGeom prst="rect">
@@ -4467,7 +4491,7 @@
         </p:nvSpPr>
         <p:spPr>
           <a:xfrm>
-            <a:off x="274320" y="2481800"/>
+            <a:off x="274320" y="2629120"/>
             <a:ext cx="3231360" cy="215900"/>
           </a:xfrm>
           <a:prstGeom prst="rect">
@@ -4514,7 +4538,7 @@
         </p:nvSpPr>
         <p:spPr>
           <a:xfrm>
-            <a:off x="274320" y="2634200"/>
+            <a:off x="274320" y="2781520"/>
             <a:ext cx="3231360" cy="358140"/>
           </a:xfrm>
           <a:prstGeom prst="rect">
@@ -4585,7 +4609,7 @@
         </p:nvSpPr>
         <p:spPr>
           <a:xfrm>
-            <a:off x="274320" y="2954240"/>
+            <a:off x="274320" y="3101560"/>
             <a:ext cx="3231360" cy="193040"/>
           </a:xfrm>
           <a:prstGeom prst="rect">
@@ -4632,7 +4656,7 @@
         </p:nvSpPr>
         <p:spPr>
           <a:xfrm>
-            <a:off x="172720" y="3210780"/>
+            <a:off x="172720" y="3358100"/>
             <a:ext cx="3434560" cy="716280"/>
           </a:xfrm>
           <a:prstGeom prst="rect">
@@ -4677,7 +4701,7 @@
         </p:nvSpPr>
         <p:spPr>
           <a:xfrm>
-            <a:off x="274320" y="3248880"/>
+            <a:off x="274320" y="3396200"/>
             <a:ext cx="3231360" cy="215900"/>
           </a:xfrm>
           <a:prstGeom prst="rect">
@@ -4724,7 +4748,7 @@
         </p:nvSpPr>
         <p:spPr>
           <a:xfrm>
-            <a:off x="274320" y="3401280"/>
+            <a:off x="274320" y="3548600"/>
             <a:ext cx="3231360" cy="358140"/>
           </a:xfrm>
           <a:prstGeom prst="rect">
@@ -4795,7 +4819,7 @@
         </p:nvSpPr>
         <p:spPr>
           <a:xfrm>
-            <a:off x="274320" y="3721320"/>
+            <a:off x="274320" y="3868640"/>
             <a:ext cx="3231360" cy="193040"/>
           </a:xfrm>
           <a:prstGeom prst="rect">
@@ -5053,7 +5077,7 @@
         <p:spPr>
           <a:xfrm>
             <a:off x="3952720" y="762220"/>
-            <a:ext cx="3434560" cy="716280"/>
+            <a:ext cx="3434560" cy="863600"/>
           </a:xfrm>
           <a:prstGeom prst="rect">
             <a:avLst/>
@@ -5138,14 +5162,14 @@
       </p:sp>
       <p:sp>
         <p:nvSpPr>
-          <p:cNvPr id="27" name="按镜片注册范围；角膜曲率39.00～48.00 D；卫生、理解及依从性良好。禁忌：&lt;8岁，内皮密度&lt;"/>
+          <p:cNvPr id="27" name="按镜片注册范围；角膜曲率39.00～48.00 D；卫生、理解及依从性良好。禁忌：8岁以下（原文表述"/>
           <p:cNvSpPr txBox="1"/>
           <p:nvPr/>
         </p:nvSpPr>
         <p:spPr>
           <a:xfrm>
             <a:off x="4054320" y="952720"/>
-            <a:ext cx="3231360" cy="358140"/>
+            <a:ext cx="3231360" cy="505459"/>
           </a:xfrm>
           <a:prstGeom prst="rect">
             <a:avLst/>
@@ -5202,7 +5226,31 @@
                 <a:ea typeface="Microsoft YaHei"/>
                 <a:cs typeface="Microsoft YaHei"/>
               </a:rPr>
-              <a:t>依从性良好。禁忌：&lt;8岁，内皮密度&lt;2 000个/mm²。</a:t>
+              <a:t>依从性良好。禁忌：8岁以下（原文表述），内皮密度&lt;2 000</a:t>
+            </a:r>
+          </a:p>
+          <a:p>
+            <a:pPr>
+              <a:lnSpc>
+                <a:spcPts val="1160"/>
+              </a:lnSpc>
+              <a:spcBef>
+                <a:spcPts val="0"/>
+              </a:spcBef>
+              <a:spcAft>
+                <a:spcPts val="0"/>
+              </a:spcAft>
+            </a:pPr>
+            <a:r>
+              <a:rPr sz="950" b="0" lang="zh-CN">
+                <a:solidFill>
+                  <a:srgbClr val="000000"/>
+                </a:solidFill>
+                <a:latin typeface="Microsoft YaHei"/>
+                <a:ea typeface="Microsoft YaHei"/>
+                <a:cs typeface="Microsoft YaHei"/>
+              </a:rPr>
+              <a:t>个/mm²。</a:t>
             </a:r>
           </a:p>
         </p:txBody>
@@ -5215,7 +5263,7 @@
         </p:nvSpPr>
         <p:spPr>
           <a:xfrm>
-            <a:off x="4054320" y="1272760"/>
+            <a:off x="4054320" y="1420080"/>
             <a:ext cx="3231360" cy="193040"/>
           </a:xfrm>
           <a:prstGeom prst="rect">
@@ -5262,7 +5310,7 @@
         </p:nvSpPr>
         <p:spPr>
           <a:xfrm>
-            <a:off x="3952720" y="1529300"/>
+            <a:off x="3952720" y="1676620"/>
             <a:ext cx="3434560" cy="863600"/>
           </a:xfrm>
           <a:prstGeom prst="rect">
@@ -5307,7 +5355,7 @@
         </p:nvSpPr>
         <p:spPr>
           <a:xfrm>
-            <a:off x="4054320" y="1567400"/>
+            <a:off x="4054320" y="1714720"/>
             <a:ext cx="3231360" cy="215900"/>
           </a:xfrm>
           <a:prstGeom prst="rect">
@@ -5354,7 +5402,7 @@
         </p:nvSpPr>
         <p:spPr>
           <a:xfrm>
-            <a:off x="4054320" y="1719800"/>
+            <a:off x="4054320" y="1867120"/>
             <a:ext cx="3231360" cy="505459"/>
           </a:xfrm>
           <a:prstGeom prst="rect">
@@ -5449,7 +5497,7 @@
         </p:nvSpPr>
         <p:spPr>
           <a:xfrm>
-            <a:off x="4054320" y="2187160"/>
+            <a:off x="4054320" y="2334480"/>
             <a:ext cx="3231360" cy="193040"/>
           </a:xfrm>
           <a:prstGeom prst="rect">
@@ -5496,7 +5544,7 @@
         </p:nvSpPr>
         <p:spPr>
           <a:xfrm>
-            <a:off x="3952720" y="2443700"/>
+            <a:off x="3952720" y="2591020"/>
             <a:ext cx="3434560" cy="716280"/>
           </a:xfrm>
           <a:prstGeom prst="rect">
@@ -5541,7 +5589,7 @@
         </p:nvSpPr>
         <p:spPr>
           <a:xfrm>
-            <a:off x="4054320" y="2481800"/>
+            <a:off x="4054320" y="2629120"/>
             <a:ext cx="3231360" cy="215900"/>
           </a:xfrm>
           <a:prstGeom prst="rect">
@@ -5588,7 +5636,7 @@
         </p:nvSpPr>
         <p:spPr>
           <a:xfrm>
-            <a:off x="4054320" y="2634200"/>
+            <a:off x="4054320" y="2781520"/>
             <a:ext cx="3231360" cy="358140"/>
           </a:xfrm>
           <a:prstGeom prst="rect">
@@ -5659,7 +5707,7 @@
         </p:nvSpPr>
         <p:spPr>
           <a:xfrm>
-            <a:off x="4054320" y="2954240"/>
+            <a:off x="4054320" y="3101560"/>
             <a:ext cx="3231360" cy="193040"/>
           </a:xfrm>
           <a:prstGeom prst="rect">
@@ -5706,7 +5754,7 @@
         </p:nvSpPr>
         <p:spPr>
           <a:xfrm>
-            <a:off x="3952720" y="3210780"/>
+            <a:off x="3952720" y="3358100"/>
             <a:ext cx="3434560" cy="716280"/>
           </a:xfrm>
           <a:prstGeom prst="rect">
@@ -5751,7 +5799,7 @@
         </p:nvSpPr>
         <p:spPr>
           <a:xfrm>
-            <a:off x="4054320" y="3248880"/>
+            <a:off x="4054320" y="3396200"/>
             <a:ext cx="3231360" cy="215900"/>
           </a:xfrm>
           <a:prstGeom prst="rect">
@@ -5798,7 +5846,7 @@
         </p:nvSpPr>
         <p:spPr>
           <a:xfrm>
-            <a:off x="4054320" y="3401280"/>
+            <a:off x="4054320" y="3548600"/>
             <a:ext cx="3231360" cy="358140"/>
           </a:xfrm>
           <a:prstGeom prst="rect">
@@ -5869,7 +5917,7 @@
         </p:nvSpPr>
         <p:spPr>
           <a:xfrm>
-            <a:off x="4054320" y="3721320"/>
+            <a:off x="4054320" y="3868640"/>
             <a:ext cx="3231360" cy="193040"/>
           </a:xfrm>
           <a:prstGeom prst="rect">
@@ -6127,7 +6175,7 @@
         <p:spPr>
           <a:xfrm>
             <a:off x="172720" y="6090220"/>
-            <a:ext cx="3434560" cy="716280"/>
+            <a:ext cx="3434560" cy="863600"/>
           </a:xfrm>
           <a:prstGeom prst="rect">
             <a:avLst/>
@@ -6212,14 +6260,14 @@
       </p:sp>
       <p:sp>
         <p:nvSpPr>
-          <p:cNvPr id="47" name="按镜片注册范围；角膜曲率39.00～48.00 D；卫生、理解及依从性良好。禁忌：&lt;8岁，内皮密度&lt;"/>
+          <p:cNvPr id="47" name="按镜片注册范围；角膜曲率39.00～48.00 D；卫生、理解及依从性良好。禁忌：8岁以下（原文表述"/>
           <p:cNvSpPr txBox="1"/>
           <p:nvPr/>
         </p:nvSpPr>
         <p:spPr>
           <a:xfrm>
             <a:off x="274320" y="6280720"/>
-            <a:ext cx="3231360" cy="358140"/>
+            <a:ext cx="3231360" cy="505459"/>
           </a:xfrm>
           <a:prstGeom prst="rect">
             <a:avLst/>
@@ -6276,7 +6324,31 @@
                 <a:ea typeface="Microsoft YaHei"/>
                 <a:cs typeface="Microsoft YaHei"/>
               </a:rPr>
-              <a:t>依从性良好。禁忌：&lt;8岁，内皮密度&lt;2 000个/mm²。</a:t>
+              <a:t>依从性良好。禁忌：8岁以下（原文表述），内皮密度&lt;2 000</a:t>
+            </a:r>
+          </a:p>
+          <a:p>
+            <a:pPr>
+              <a:lnSpc>
+                <a:spcPts val="1160"/>
+              </a:lnSpc>
+              <a:spcBef>
+                <a:spcPts val="0"/>
+              </a:spcBef>
+              <a:spcAft>
+                <a:spcPts val="0"/>
+              </a:spcAft>
+            </a:pPr>
+            <a:r>
+              <a:rPr sz="950" b="0" lang="zh-CN">
+                <a:solidFill>
+                  <a:srgbClr val="000000"/>
+                </a:solidFill>
+                <a:latin typeface="Microsoft YaHei"/>
+                <a:ea typeface="Microsoft YaHei"/>
+                <a:cs typeface="Microsoft YaHei"/>
+              </a:rPr>
+              <a:t>个/mm²。</a:t>
             </a:r>
           </a:p>
         </p:txBody>
@@ -6289,7 +6361,7 @@
         </p:nvSpPr>
         <p:spPr>
           <a:xfrm>
-            <a:off x="274320" y="6600760"/>
+            <a:off x="274320" y="6748080"/>
             <a:ext cx="3231360" cy="193040"/>
           </a:xfrm>
           <a:prstGeom prst="rect">
@@ -6336,7 +6408,7 @@
         </p:nvSpPr>
         <p:spPr>
           <a:xfrm>
-            <a:off x="172720" y="6857300"/>
+            <a:off x="172720" y="7004620"/>
             <a:ext cx="3434560" cy="863600"/>
           </a:xfrm>
           <a:prstGeom prst="rect">
@@ -6381,7 +6453,7 @@
         </p:nvSpPr>
         <p:spPr>
           <a:xfrm>
-            <a:off x="274320" y="6895400"/>
+            <a:off x="274320" y="7042720"/>
             <a:ext cx="3231360" cy="215900"/>
           </a:xfrm>
           <a:prstGeom prst="rect">
@@ -6428,7 +6500,7 @@
         </p:nvSpPr>
         <p:spPr>
           <a:xfrm>
-            <a:off x="274320" y="7047800"/>
+            <a:off x="274320" y="7195120"/>
             <a:ext cx="3231360" cy="505459"/>
           </a:xfrm>
           <a:prstGeom prst="rect">
@@ -6523,7 +6595,7 @@
         </p:nvSpPr>
         <p:spPr>
           <a:xfrm>
-            <a:off x="274320" y="7515160"/>
+            <a:off x="274320" y="7662480"/>
             <a:ext cx="3231360" cy="193040"/>
           </a:xfrm>
           <a:prstGeom prst="rect">
@@ -6570,7 +6642,7 @@
         </p:nvSpPr>
         <p:spPr>
           <a:xfrm>
-            <a:off x="172720" y="7771700"/>
+            <a:off x="172720" y="7919020"/>
             <a:ext cx="3434560" cy="716280"/>
           </a:xfrm>
           <a:prstGeom prst="rect">
@@ -6615,7 +6687,7 @@
         </p:nvSpPr>
         <p:spPr>
           <a:xfrm>
-            <a:off x="274320" y="7809800"/>
+            <a:off x="274320" y="7957120"/>
             <a:ext cx="3231360" cy="215900"/>
           </a:xfrm>
           <a:prstGeom prst="rect">
@@ -6662,7 +6734,7 @@
         </p:nvSpPr>
         <p:spPr>
           <a:xfrm>
-            <a:off x="274320" y="7962200"/>
+            <a:off x="274320" y="8109520"/>
             <a:ext cx="3231360" cy="358140"/>
           </a:xfrm>
           <a:prstGeom prst="rect">
@@ -6733,7 +6805,7 @@
         </p:nvSpPr>
         <p:spPr>
           <a:xfrm>
-            <a:off x="274320" y="8282240"/>
+            <a:off x="274320" y="8429560"/>
             <a:ext cx="3231360" cy="193040"/>
           </a:xfrm>
           <a:prstGeom prst="rect">
@@ -6780,7 +6852,7 @@
         </p:nvSpPr>
         <p:spPr>
           <a:xfrm>
-            <a:off x="172720" y="8538780"/>
+            <a:off x="172720" y="8686100"/>
             <a:ext cx="3434560" cy="716280"/>
           </a:xfrm>
           <a:prstGeom prst="rect">
@@ -6825,7 +6897,7 @@
         </p:nvSpPr>
         <p:spPr>
           <a:xfrm>
-            <a:off x="274320" y="8576880"/>
+            <a:off x="274320" y="8724200"/>
             <a:ext cx="3231360" cy="215900"/>
           </a:xfrm>
           <a:prstGeom prst="rect">
@@ -6872,7 +6944,7 @@
         </p:nvSpPr>
         <p:spPr>
           <a:xfrm>
-            <a:off x="274320" y="8729280"/>
+            <a:off x="274320" y="8876600"/>
             <a:ext cx="3231360" cy="358140"/>
           </a:xfrm>
           <a:prstGeom prst="rect">
@@ -6943,7 +7015,7 @@
         </p:nvSpPr>
         <p:spPr>
           <a:xfrm>
-            <a:off x="274320" y="9049320"/>
+            <a:off x="274320" y="9196640"/>
             <a:ext cx="3231360" cy="193040"/>
           </a:xfrm>
           <a:prstGeom prst="rect">
@@ -7201,7 +7273,7 @@
         <p:spPr>
           <a:xfrm>
             <a:off x="3952720" y="6090220"/>
-            <a:ext cx="3434560" cy="716280"/>
+            <a:ext cx="3434560" cy="863600"/>
           </a:xfrm>
           <a:prstGeom prst="rect">
             <a:avLst/>
@@ -7286,14 +7358,14 @@
       </p:sp>
       <p:sp>
         <p:nvSpPr>
-          <p:cNvPr id="67" name="按镜片注册范围；角膜曲率39.00～48.00 D；卫生、理解及依从性良好。禁忌：&lt;8岁，内皮密度&lt;"/>
+          <p:cNvPr id="67" name="按镜片注册范围；角膜曲率39.00～48.00 D；卫生、理解及依从性良好。禁忌：8岁以下（原文表述"/>
           <p:cNvSpPr txBox="1"/>
           <p:nvPr/>
         </p:nvSpPr>
         <p:spPr>
           <a:xfrm>
             <a:off x="4054320" y="6280720"/>
-            <a:ext cx="3231360" cy="358140"/>
+            <a:ext cx="3231360" cy="505459"/>
           </a:xfrm>
           <a:prstGeom prst="rect">
             <a:avLst/>
@@ -7350,7 +7422,31 @@
                 <a:ea typeface="Microsoft YaHei"/>
                 <a:cs typeface="Microsoft YaHei"/>
               </a:rPr>
-              <a:t>依从性良好。禁忌：&lt;8岁，内皮密度&lt;2 000个/mm²。</a:t>
+              <a:t>依从性良好。禁忌：8岁以下（原文表述），内皮密度&lt;2 000</a:t>
+            </a:r>
+          </a:p>
+          <a:p>
+            <a:pPr>
+              <a:lnSpc>
+                <a:spcPts val="1160"/>
+              </a:lnSpc>
+              <a:spcBef>
+                <a:spcPts val="0"/>
+              </a:spcBef>
+              <a:spcAft>
+                <a:spcPts val="0"/>
+              </a:spcAft>
+            </a:pPr>
+            <a:r>
+              <a:rPr sz="950" b="0" lang="zh-CN">
+                <a:solidFill>
+                  <a:srgbClr val="000000"/>
+                </a:solidFill>
+                <a:latin typeface="Microsoft YaHei"/>
+                <a:ea typeface="Microsoft YaHei"/>
+                <a:cs typeface="Microsoft YaHei"/>
+              </a:rPr>
+              <a:t>个/mm²。</a:t>
             </a:r>
           </a:p>
         </p:txBody>
@@ -7363,7 +7459,7 @@
         </p:nvSpPr>
         <p:spPr>
           <a:xfrm>
-            <a:off x="4054320" y="6600760"/>
+            <a:off x="4054320" y="6748080"/>
             <a:ext cx="3231360" cy="193040"/>
           </a:xfrm>
           <a:prstGeom prst="rect">
@@ -7410,7 +7506,7 @@
         </p:nvSpPr>
         <p:spPr>
           <a:xfrm>
-            <a:off x="3952720" y="6857300"/>
+            <a:off x="3952720" y="7004620"/>
             <a:ext cx="3434560" cy="863600"/>
           </a:xfrm>
           <a:prstGeom prst="rect">
@@ -7455,7 +7551,7 @@
         </p:nvSpPr>
         <p:spPr>
           <a:xfrm>
-            <a:off x="4054320" y="6895400"/>
+            <a:off x="4054320" y="7042720"/>
             <a:ext cx="3231360" cy="215900"/>
           </a:xfrm>
           <a:prstGeom prst="rect">
@@ -7502,7 +7598,7 @@
         </p:nvSpPr>
         <p:spPr>
           <a:xfrm>
-            <a:off x="4054320" y="7047800"/>
+            <a:off x="4054320" y="7195120"/>
             <a:ext cx="3231360" cy="505459"/>
           </a:xfrm>
           <a:prstGeom prst="rect">
@@ -7597,7 +7693,7 @@
         </p:nvSpPr>
         <p:spPr>
           <a:xfrm>
-            <a:off x="4054320" y="7515160"/>
+            <a:off x="4054320" y="7662480"/>
             <a:ext cx="3231360" cy="193040"/>
           </a:xfrm>
           <a:prstGeom prst="rect">
@@ -7644,7 +7740,7 @@
         </p:nvSpPr>
         <p:spPr>
           <a:xfrm>
-            <a:off x="3952720" y="7771700"/>
+            <a:off x="3952720" y="7919020"/>
             <a:ext cx="3434560" cy="716280"/>
           </a:xfrm>
           <a:prstGeom prst="rect">
@@ -7689,7 +7785,7 @@
         </p:nvSpPr>
         <p:spPr>
           <a:xfrm>
-            <a:off x="4054320" y="7809800"/>
+            <a:off x="4054320" y="7957120"/>
             <a:ext cx="3231360" cy="215900"/>
           </a:xfrm>
           <a:prstGeom prst="rect">
@@ -7736,7 +7832,7 @@
         </p:nvSpPr>
         <p:spPr>
           <a:xfrm>
-            <a:off x="4054320" y="7962200"/>
+            <a:off x="4054320" y="8109520"/>
             <a:ext cx="3231360" cy="358140"/>
           </a:xfrm>
           <a:prstGeom prst="rect">
@@ -7807,7 +7903,7 @@
         </p:nvSpPr>
         <p:spPr>
           <a:xfrm>
-            <a:off x="4054320" y="8282240"/>
+            <a:off x="4054320" y="8429560"/>
             <a:ext cx="3231360" cy="193040"/>
           </a:xfrm>
           <a:prstGeom prst="rect">
@@ -7854,7 +7950,7 @@
         </p:nvSpPr>
         <p:spPr>
           <a:xfrm>
-            <a:off x="3952720" y="8538780"/>
+            <a:off x="3952720" y="8686100"/>
             <a:ext cx="3434560" cy="716280"/>
           </a:xfrm>
           <a:prstGeom prst="rect">
@@ -7899,7 +7995,7 @@
         </p:nvSpPr>
         <p:spPr>
           <a:xfrm>
-            <a:off x="4054320" y="8576880"/>
+            <a:off x="4054320" y="8724200"/>
             <a:ext cx="3231360" cy="215900"/>
           </a:xfrm>
           <a:prstGeom prst="rect">
@@ -7946,7 +8042,7 @@
         </p:nvSpPr>
         <p:spPr>
           <a:xfrm>
-            <a:off x="4054320" y="8729280"/>
+            <a:off x="4054320" y="8876600"/>
             <a:ext cx="3231360" cy="358140"/>
           </a:xfrm>
           <a:prstGeom prst="rect">
@@ -8017,7 +8113,7 @@
         </p:nvSpPr>
         <p:spPr>
           <a:xfrm>
-            <a:off x="4054320" y="9049320"/>
+            <a:off x="4054320" y="9196640"/>
             <a:ext cx="3231360" cy="193040"/>
           </a:xfrm>
           <a:prstGeom prst="rect">
